--- a/dist/sunum/induksiyon-akimi.pptx
+++ b/dist/sunum/induksiyon-akimi.pptx
@@ -4479,7 +4479,7 @@
       </p:grpSpPr>
       <p:pic>
         <p:nvPicPr>
-          <p:cNvPr id="2" name="Image 0" descr="/tmp/claude-1000/-opt-dersler/8a8328c3-841c-44fa-b76f-82572d338d3d/scratchpad/d4/sek/induksiyon-akimi-kapak.jpg">    </p:cNvPr>
+          <p:cNvPr id="2" name="Image 0" descr="/tmp/claude-1000/-opt-dersler/8a8328c3-841c-44fa-b76f-82572d338d3d/scratchpad/d5/sek/induksiyon-akimi-kapak.jpg">    </p:cNvPr>
           <p:cNvPicPr>
             <a:picLocks noChangeAspect="1"/>
           </p:cNvPicPr>
@@ -5132,69 +5132,6 @@
         </p:nvSpPr>
         <p:spPr>
           <a:xfrm>
-            <a:off x="9448495" y="6309360"/>
-            <a:ext cx="2103120" cy="274320"/>
-          </a:xfrm>
-          <a:prstGeom prst="roundRect">
-            <a:avLst>
-              <a:gd name="adj" fmla="val 50000"/>
-            </a:avLst>
-          </a:prstGeom>
-          <a:solidFill>
-            <a:srgbClr val="0E1426">
-              <a:alpha val="65000"/>
-            </a:srgbClr>
-          </a:solidFill>
-          <a:ln/>
-        </p:spPr>
-      </p:sp>
-      <p:sp>
-        <p:nvSpPr>
-          <p:cNvPr id="22" name="Text 19"/>
-          <p:cNvSpPr txBox="1"/>
-          <p:nvPr/>
-        </p:nvSpPr>
-        <p:spPr>
-          <a:xfrm>
-            <a:off x="9448495" y="6309360"/>
-            <a:ext cx="2103120" cy="274320"/>
-          </a:xfrm>
-          <a:prstGeom prst="rect">
-            <a:avLst/>
-          </a:prstGeom>
-          <a:noFill/>
-          <a:ln/>
-        </p:spPr>
-        <p:txBody>
-          <a:bodyPr wrap="square" lIns="0" tIns="0" rIns="0" bIns="0" rtlCol="0" anchor="ctr"/>
-          <a:lstStyle/>
-          <a:p>
-            <a:pPr algn="ctr" indent="0" marL="0">
-              <a:buNone/>
-            </a:pPr>
-            <a:r>
-              <a:rPr lang="en-US" sz="900" dirty="0">
-                <a:solidFill>
-                  <a:srgbClr val="E4E9F5"/>
-                </a:solidFill>
-                <a:latin typeface="Calibri" pitchFamily="34" charset="0"/>
-                <a:ea typeface="Calibri" pitchFamily="34" charset="-122"/>
-                <a:cs typeface="Calibri" pitchFamily="34" charset="-120"/>
-              </a:rPr>
-              <a:t>Görsel: yapay zekâ ile üretildi</a:t>
-            </a:r>
-            <a:endParaRPr lang="en-US" sz="900" dirty="0"/>
-          </a:p>
-        </p:txBody>
-      </p:sp>
-      <p:sp>
-        <p:nvSpPr>
-          <p:cNvPr id="23" name="Shape 20"/>
-          <p:cNvSpPr/>
-          <p:nvPr/>
-        </p:nvSpPr>
-        <p:spPr>
-          <a:xfrm>
             <a:off x="640080" y="6382512"/>
             <a:ext cx="128016" cy="128016"/>
           </a:xfrm>
@@ -5211,7 +5148,7 @@
       </p:sp>
       <p:sp>
         <p:nvSpPr>
-          <p:cNvPr id="24" name="Text 21"/>
+          <p:cNvPr id="22" name="Text 19"/>
           <p:cNvSpPr txBox="1"/>
           <p:nvPr/>
         </p:nvSpPr>
@@ -5816,7 +5753,7 @@
       </p:sp>
       <p:pic>
         <p:nvPicPr>
-          <p:cNvPr id="14" name="Image 0" descr="/tmp/claude-1000/-opt-dersler/8a8328c3-841c-44fa-b76f-82572d338d3d/scratchpad/d4/sek/induksiyon-akimi-03.png">    </p:cNvPr>
+          <p:cNvPr id="14" name="Image 0" descr="/tmp/claude-1000/-opt-dersler/8a8328c3-841c-44fa-b76f-82572d338d3d/scratchpad/d5/sek/induksiyon-akimi-03.png">    </p:cNvPr>
           <p:cNvPicPr>
             <a:picLocks noChangeAspect="1"/>
           </p:cNvPicPr>
@@ -11540,7 +11477,7 @@
       </p:sp>
       <p:pic>
         <p:nvPicPr>
-          <p:cNvPr id="12" name="Image 0" descr="/tmp/claude-1000/-opt-dersler/8a8328c3-841c-44fa-b76f-82572d338d3d/scratchpad/d4/sek/induksiyon-akimi-04.png">    </p:cNvPr>
+          <p:cNvPr id="12" name="Image 0" descr="/tmp/claude-1000/-opt-dersler/8a8328c3-841c-44fa-b76f-82572d338d3d/scratchpad/d5/sek/induksiyon-akimi-04.png">    </p:cNvPr>
           <p:cNvPicPr>
             <a:picLocks noChangeAspect="1"/>
           </p:cNvPicPr>
@@ -12534,7 +12471,7 @@
       </p:sp>
       <p:pic>
         <p:nvPicPr>
-          <p:cNvPr id="17" name="Image 0" descr="/tmp/claude-1000/-opt-dersler/8a8328c3-841c-44fa-b76f-82572d338d3d/scratchpad/d4/sek/induksiyon-akimi-05.png">    </p:cNvPr>
+          <p:cNvPr id="17" name="Image 0" descr="/tmp/claude-1000/-opt-dersler/8a8328c3-841c-44fa-b76f-82572d338d3d/scratchpad/d5/sek/induksiyon-akimi-05.png">    </p:cNvPr>
           <p:cNvPicPr>
             <a:picLocks noChangeAspect="1"/>
           </p:cNvPicPr>
@@ -15714,7 +15651,7 @@
       </p:sp>
       <p:pic>
         <p:nvPicPr>
-          <p:cNvPr id="20" name="Image 0" descr="/tmp/claude-1000/-opt-dersler/8a8328c3-841c-44fa-b76f-82572d338d3d/scratchpad/d4/sek/induksiyon-akimi-06.png">    </p:cNvPr>
+          <p:cNvPr id="20" name="Image 0" descr="/tmp/claude-1000/-opt-dersler/8a8328c3-841c-44fa-b76f-82572d338d3d/scratchpad/d5/sek/induksiyon-akimi-06.png">    </p:cNvPr>
           <p:cNvPicPr>
             <a:picLocks noChangeAspect="1"/>
           </p:cNvPicPr>
@@ -16348,7 +16285,7 @@
       </p:sp>
       <p:pic>
         <p:nvPicPr>
-          <p:cNvPr id="10" name="Image 0" descr="/tmp/claude-1000/-opt-dersler/8a8328c3-841c-44fa-b76f-82572d338d3d/scratchpad/d4/sek/induksiyon-akimi-uygulama-kart.jpg">    </p:cNvPr>
+          <p:cNvPr id="10" name="Image 0" descr="/tmp/claude-1000/-opt-dersler/8a8328c3-841c-44fa-b76f-82572d338d3d/scratchpad/d5/sek/induksiyon-akimi-uygulama-kart.jpg">    </p:cNvPr>
           <p:cNvPicPr>
             <a:picLocks noChangeAspect="1"/>
           </p:cNvPicPr>
@@ -16372,70 +16309,7 @@
       </p:pic>
       <p:sp>
         <p:nvSpPr>
-          <p:cNvPr id="11" name="Shape 8"/>
-          <p:cNvSpPr/>
-          <p:nvPr/>
-        </p:nvSpPr>
-        <p:spPr>
-          <a:xfrm>
-            <a:off x="9704527" y="4198925"/>
-            <a:ext cx="1755648" cy="246888"/>
-          </a:xfrm>
-          <a:prstGeom prst="roundRect">
-            <a:avLst>
-              <a:gd name="adj" fmla="val 48148"/>
-            </a:avLst>
-          </a:prstGeom>
-          <a:solidFill>
-            <a:srgbClr val="0E1426">
-              <a:alpha val="60000"/>
-            </a:srgbClr>
-          </a:solidFill>
-          <a:ln/>
-        </p:spPr>
-      </p:sp>
-      <p:sp>
-        <p:nvSpPr>
-          <p:cNvPr id="12" name="Text 9"/>
-          <p:cNvSpPr txBox="1"/>
-          <p:nvPr/>
-        </p:nvSpPr>
-        <p:spPr>
-          <a:xfrm>
-            <a:off x="9704527" y="4198925"/>
-            <a:ext cx="1755648" cy="246888"/>
-          </a:xfrm>
-          <a:prstGeom prst="rect">
-            <a:avLst/>
-          </a:prstGeom>
-          <a:noFill/>
-          <a:ln/>
-        </p:spPr>
-        <p:txBody>
-          <a:bodyPr wrap="square" lIns="0" tIns="0" rIns="0" bIns="0" rtlCol="0" anchor="ctr"/>
-          <a:lstStyle/>
-          <a:p>
-            <a:pPr algn="ctr" indent="0" marL="0">
-              <a:buNone/>
-            </a:pPr>
-            <a:r>
-              <a:rPr lang="en-US" sz="850" dirty="0">
-                <a:solidFill>
-                  <a:srgbClr val="FFFFFF"/>
-                </a:solidFill>
-                <a:latin typeface="Calibri" pitchFamily="34" charset="0"/>
-                <a:ea typeface="Calibri" pitchFamily="34" charset="-122"/>
-                <a:cs typeface="Calibri" pitchFamily="34" charset="-120"/>
-              </a:rPr>
-              <a:t>Yapay zekâ ile üretildi</a:t>
-            </a:r>
-            <a:endParaRPr lang="en-US" sz="850" dirty="0"/>
-          </a:p>
-        </p:txBody>
-      </p:sp>
-      <p:sp>
-        <p:nvSpPr>
-          <p:cNvPr id="13" name="Text 10"/>
+          <p:cNvPr id="11" name="Text 8"/>
           <p:cNvSpPr txBox="1"/>
           <p:nvPr/>
         </p:nvSpPr>
@@ -16494,7 +16368,7 @@
       </p:sp>
       <p:sp>
         <p:nvSpPr>
-          <p:cNvPr id="14" name="Shape 11"/>
+          <p:cNvPr id="12" name="Shape 9"/>
           <p:cNvSpPr/>
           <p:nvPr/>
         </p:nvSpPr>
@@ -16516,7 +16390,7 @@
       </p:sp>
       <p:sp>
         <p:nvSpPr>
-          <p:cNvPr id="15" name="Text 12"/>
+          <p:cNvPr id="13" name="Text 10"/>
           <p:cNvSpPr txBox="1"/>
           <p:nvPr/>
         </p:nvSpPr>
@@ -16555,7 +16429,7 @@
       </p:sp>
       <p:sp>
         <p:nvSpPr>
-          <p:cNvPr id="16" name="Text 13"/>
+          <p:cNvPr id="14" name="Text 11"/>
           <p:cNvSpPr txBox="1"/>
           <p:nvPr/>
         </p:nvSpPr>
@@ -17054,7 +16928,7 @@
       </p:sp>
       <p:pic>
         <p:nvPicPr>
-          <p:cNvPr id="11" name="Image 0" descr="/tmp/claude-1000/-opt-dersler/8a8328c3-841c-44fa-b76f-82572d338d3d/scratchpad/d4/sek/induksiyon-akimi-07.png">    </p:cNvPr>
+          <p:cNvPr id="11" name="Image 0" descr="/tmp/claude-1000/-opt-dersler/8a8328c3-841c-44fa-b76f-82572d338d3d/scratchpad/d5/sek/induksiyon-akimi-07.png">    </p:cNvPr>
           <p:cNvPicPr>
             <a:picLocks noChangeAspect="1"/>
           </p:cNvPicPr>
@@ -35673,7 +35547,7 @@
       </p:sp>
       <p:pic>
         <p:nvPicPr>
-          <p:cNvPr id="11" name="Image 0" descr="/tmp/claude-1000/-opt-dersler/8a8328c3-841c-44fa-b76f-82572d338d3d/scratchpad/d4/sek/induksiyon-akimi-gunluk-kart.jpg">    </p:cNvPr>
+          <p:cNvPr id="11" name="Image 0" descr="/tmp/claude-1000/-opt-dersler/8a8328c3-841c-44fa-b76f-82572d338d3d/scratchpad/d5/sek/induksiyon-akimi-gunluk-kart.jpg">    </p:cNvPr>
           <p:cNvPicPr>
             <a:picLocks noChangeAspect="1"/>
           </p:cNvPicPr>
@@ -35697,70 +35571,7 @@
       </p:pic>
       <p:sp>
         <p:nvSpPr>
-          <p:cNvPr id="12" name="Shape 9"/>
-          <p:cNvSpPr/>
-          <p:nvPr/>
-        </p:nvSpPr>
-        <p:spPr>
-          <a:xfrm>
-            <a:off x="9704527" y="4198925"/>
-            <a:ext cx="1755648" cy="246888"/>
-          </a:xfrm>
-          <a:prstGeom prst="roundRect">
-            <a:avLst>
-              <a:gd name="adj" fmla="val 48148"/>
-            </a:avLst>
-          </a:prstGeom>
-          <a:solidFill>
-            <a:srgbClr val="0E1426">
-              <a:alpha val="60000"/>
-            </a:srgbClr>
-          </a:solidFill>
-          <a:ln/>
-        </p:spPr>
-      </p:sp>
-      <p:sp>
-        <p:nvSpPr>
-          <p:cNvPr id="13" name="Text 10"/>
-          <p:cNvSpPr txBox="1"/>
-          <p:nvPr/>
-        </p:nvSpPr>
-        <p:spPr>
-          <a:xfrm>
-            <a:off x="9704527" y="4198925"/>
-            <a:ext cx="1755648" cy="246888"/>
-          </a:xfrm>
-          <a:prstGeom prst="rect">
-            <a:avLst/>
-          </a:prstGeom>
-          <a:noFill/>
-          <a:ln/>
-        </p:spPr>
-        <p:txBody>
-          <a:bodyPr wrap="square" lIns="0" tIns="0" rIns="0" bIns="0" rtlCol="0" anchor="ctr"/>
-          <a:lstStyle/>
-          <a:p>
-            <a:pPr algn="ctr" indent="0" marL="0">
-              <a:buNone/>
-            </a:pPr>
-            <a:r>
-              <a:rPr lang="en-US" sz="850" dirty="0">
-                <a:solidFill>
-                  <a:srgbClr val="FFFFFF"/>
-                </a:solidFill>
-                <a:latin typeface="Calibri" pitchFamily="34" charset="0"/>
-                <a:ea typeface="Calibri" pitchFamily="34" charset="-122"/>
-                <a:cs typeface="Calibri" pitchFamily="34" charset="-120"/>
-              </a:rPr>
-              <a:t>Yapay zekâ ile üretildi</a:t>
-            </a:r>
-            <a:endParaRPr lang="en-US" sz="850" dirty="0"/>
-          </a:p>
-        </p:txBody>
-      </p:sp>
-      <p:sp>
-        <p:nvSpPr>
-          <p:cNvPr id="14" name="Text 11"/>
+          <p:cNvPr id="12" name="Text 9"/>
           <p:cNvSpPr txBox="1"/>
           <p:nvPr/>
         </p:nvSpPr>
@@ -35836,7 +35647,7 @@
       </p:sp>
       <p:sp>
         <p:nvSpPr>
-          <p:cNvPr id="15" name="Shape 12"/>
+          <p:cNvPr id="13" name="Shape 10"/>
           <p:cNvSpPr/>
           <p:nvPr/>
         </p:nvSpPr>
@@ -35858,7 +35669,7 @@
       </p:sp>
       <p:sp>
         <p:nvSpPr>
-          <p:cNvPr id="16" name="Text 13"/>
+          <p:cNvPr id="14" name="Text 11"/>
           <p:cNvSpPr txBox="1"/>
           <p:nvPr/>
         </p:nvSpPr>
@@ -35897,7 +35708,7 @@
       </p:sp>
       <p:sp>
         <p:nvSpPr>
-          <p:cNvPr id="17" name="Text 14"/>
+          <p:cNvPr id="15" name="Text 12"/>
           <p:cNvSpPr txBox="1"/>
           <p:nvPr/>
         </p:nvSpPr>
@@ -38101,7 +37912,7 @@
       </p:sp>
       <p:pic>
         <p:nvPicPr>
-          <p:cNvPr id="16" name="Image 0" descr="/tmp/claude-1000/-opt-dersler/8a8328c3-841c-44fa-b76f-82572d338d3d/scratchpad/d4/sek/induksiyon-akimi-01.png">    </p:cNvPr>
+          <p:cNvPr id="16" name="Image 0" descr="/tmp/claude-1000/-opt-dersler/8a8328c3-841c-44fa-b76f-82572d338d3d/scratchpad/d5/sek/induksiyon-akimi-01.png">    </p:cNvPr>
           <p:cNvPicPr>
             <a:picLocks noChangeAspect="1"/>
           </p:cNvPicPr>
@@ -38931,7 +38742,7 @@
       </p:sp>
       <p:pic>
         <p:nvPicPr>
-          <p:cNvPr id="14" name="Image 0" descr="/tmp/claude-1000/-opt-dersler/8a8328c3-841c-44fa-b76f-82572d338d3d/scratchpad/d4/sek/induksiyon-akimi-02.png">    </p:cNvPr>
+          <p:cNvPr id="14" name="Image 0" descr="/tmp/claude-1000/-opt-dersler/8a8328c3-841c-44fa-b76f-82572d338d3d/scratchpad/d5/sek/induksiyon-akimi-02.png">    </p:cNvPr>
           <p:cNvPicPr>
             <a:picLocks noChangeAspect="1"/>
           </p:cNvPicPr>
